--- a/assets/pptx/catalog-790.pptx
+++ b/assets/pptx/catalog-790.pptx
@@ -3264,7 +3264,7 @@
                 <a:ea typeface="Ebrima"/>
                 <a:cs typeface="Ebrima"/>
               </a:rPr>
-              <a:t>እግዚአብሔር ለኔ ልዩ ነው (2x)</a:t>
+              <a:t>እግዚአብሔር ለኔ ልዩ ነው 2x</a:t>
             </a:r>
           </a:p>
           <a:p>
@@ -3282,7 +3282,7 @@
                 <a:ea typeface="Ebrima"/>
                 <a:cs typeface="Ebrima"/>
               </a:rPr>
-              <a:t>እግዚአብሔር ለኔ ልዩ ነው (2x)</a:t>
+              <a:t>እግዚአብሔር ለኔ ልዩ ነው 2x</a:t>
             </a:r>
           </a:p>
         </p:txBody>
@@ -3385,7 +3385,7 @@
                 <a:ea typeface="Ebrima"/>
                 <a:cs typeface="Ebrima"/>
               </a:rPr>
-              <a:t>እንደ እግዚአብሔር ያለ ማንም የለም ለዘላለም (2x)</a:t>
+              <a:t>እንደ እግዚአብሔር ያለ ማንም የለም ለዘላለም 2x</a:t>
             </a:r>
           </a:p>
         </p:txBody>
@@ -3470,7 +3470,7 @@
                 <a:ea typeface="Ebrima"/>
                 <a:cs typeface="Ebrima"/>
               </a:rPr>
-              <a:t>እግዚአብሔር ለኔ ልዩ ነው (3x)</a:t>
+              <a:t>እግዚአብሔር ለኔ ልዩ ነው 3x</a:t>
             </a:r>
           </a:p>
         </p:txBody>
@@ -3573,7 +3573,7 @@
                 <a:ea typeface="Ebrima"/>
                 <a:cs typeface="Ebrima"/>
               </a:rPr>
-              <a:t>የባርነትን በትር የሰበረው እግዚአብሔር ነው (2x)</a:t>
+              <a:t>የባርነትን በትር የሰበረው እግዚአብሔር ነው 2x</a:t>
             </a:r>
           </a:p>
         </p:txBody>
@@ -3658,7 +3658,7 @@
                 <a:ea typeface="Ebrima"/>
                 <a:cs typeface="Ebrima"/>
               </a:rPr>
-              <a:t>እግዚአብሔር ለኔ ልዩ ነው (3x)</a:t>
+              <a:t>እግዚአብሔር ለኔ ልዩ ነው 3x</a:t>
             </a:r>
           </a:p>
         </p:txBody>
@@ -3779,7 +3779,7 @@
                 <a:ea typeface="Ebrima"/>
                 <a:cs typeface="Ebrima"/>
               </a:rPr>
-              <a:t>እንደ እግዚአብሔር ያለ ማነው (ያለ ማነው) (4x)</a:t>
+              <a:t>እንደ እግዚአብሔር ያለ ማነው ያለ ማነው 4x</a:t>
             </a:r>
           </a:p>
         </p:txBody>
